--- a/pipeline/snapshots/missions/m_1776946739_cd721853/one_pager.pptx
+++ b/pipeline/snapshots/missions/m_1776946739_cd721853/one_pager.pptx
@@ -3673,7 +3673,7 @@
                 </a:solidFill>
                 <a:latin typeface="Calibri"/>
               </a:rPr>
-              <a:t>Refreshed: 2026-04-23 08:19:11 UTC</a:t>
+              <a:t>Refreshed: 2026-04-23 09:43:58 UTC</a:t>
             </a:r>
           </a:p>
         </p:txBody>

--- a/pipeline/snapshots/missions/m_1776946739_cd721853/one_pager.pptx
+++ b/pipeline/snapshots/missions/m_1776946739_cd721853/one_pager.pptx
@@ -3673,7 +3673,7 @@
                 </a:solidFill>
                 <a:latin typeface="Calibri"/>
               </a:rPr>
-              <a:t>Refreshed: 2026-04-23 09:43:58 UTC</a:t>
+              <a:t>Refreshed: 2026-04-23 10:47:52 UTC</a:t>
             </a:r>
           </a:p>
         </p:txBody>

--- a/pipeline/snapshots/missions/m_1776946739_cd721853/one_pager.pptx
+++ b/pipeline/snapshots/missions/m_1776946739_cd721853/one_pager.pptx
@@ -3673,7 +3673,7 @@
                 </a:solidFill>
                 <a:latin typeface="Calibri"/>
               </a:rPr>
-              <a:t>Refreshed: 2026-04-23 10:47:52 UTC</a:t>
+              <a:t>Refreshed: 2026-04-23 11:51:49 UTC</a:t>
             </a:r>
           </a:p>
         </p:txBody>
